--- a/media/resources/files/EkiOrunduuOnduktar_Kemituu_Bingo.pptx
+++ b/media/resources/files/EkiOrunduuOnduktar_Kemituu_Bingo.pptx
@@ -36293,7 +36293,7 @@
             </a:pPr>
             <a:r>
               <a:rPr lang="ru-RU" dirty="0"/>
-              <a:t>Турдуу пикирлер учун ыраазычылык билдиребиз.</a:t>
+              <a:t>Түрдүү пикирлер үчүн ыраазычылык билдиребиз.</a:t>
             </a:r>
           </a:p>
           <a:p>

--- a/media/resources/files/EkiOrunduuOnduktar_Kemituu_Bingo.pptx
+++ b/media/resources/files/EkiOrunduuOnduktar_Kemituu_Bingo.pptx
@@ -6618,7 +6618,7 @@
                 <a:ea typeface="+mn-ea"/>
                 <a:cs typeface="+mn-cs"/>
               </a:rPr>
-              <a:t>Окуучулар </a:t>
+              <a:t>Окуучулар тордон тогуз жоопту тандап, дептердеги 3х3 чакмакка каалагандай коюшат.</a:t>
             </a:r>
             <a:r>
               <a:rPr kumimoji="0" lang="ru-RU" sz="2000" b="0" i="0" u="none" strike="noStrike" kern="1200" cap="none" spc="0" normalizeH="0" baseline="0" noProof="0" dirty="0">
@@ -6635,7 +6635,7 @@
                 <a:ea typeface="+mn-ea"/>
                 <a:cs typeface="+mn-cs"/>
               </a:rPr>
-              <a:t>суроо</a:t>
+              <a:t/>
             </a:r>
             <a:r>
               <a:rPr kumimoji="0" lang="en-US" sz="2000" b="0" i="0" u="none" strike="noStrike" kern="1200" cap="none" spc="0" normalizeH="0" baseline="0" noProof="0" dirty="0">
@@ -6652,7 +6652,7 @@
                 <a:ea typeface="+mn-ea"/>
                 <a:cs typeface="+mn-cs"/>
               </a:rPr>
-              <a:t> </a:t>
+              <a:t/>
             </a:r>
             <a:r>
               <a:rPr kumimoji="0" lang="en-US" sz="2000" b="0" i="0" u="none" strike="noStrike" kern="1200" cap="none" spc="0" normalizeH="0" baseline="0" noProof="0" dirty="0" err="1">
@@ -6669,7 +6669,7 @@
                 <a:ea typeface="+mn-ea"/>
                 <a:cs typeface="+mn-cs"/>
               </a:rPr>
-              <a:t>тордон</a:t>
+              <a:t/>
             </a:r>
             <a:r>
               <a:rPr kumimoji="0" lang="en-US" sz="2000" b="0" i="0" u="none" strike="noStrike" kern="1200" cap="none" spc="0" normalizeH="0" baseline="0" noProof="0" dirty="0">
@@ -6686,7 +6686,7 @@
                 <a:ea typeface="+mn-ea"/>
                 <a:cs typeface="+mn-cs"/>
               </a:rPr>
-              <a:t> </a:t>
+              <a:t/>
             </a:r>
             <a:r>
               <a:rPr kumimoji="0" lang="en-US" sz="1800" b="0" i="0" u="none" strike="noStrike" kern="1200" cap="none" spc="0" normalizeH="0" baseline="0" noProof="0" dirty="0" err="1">
@@ -6703,7 +6703,7 @@
                 <a:ea typeface="+mn-ea"/>
                 <a:cs typeface="+mn-cs"/>
               </a:rPr>
-              <a:t>тогуз</a:t>
+              <a:t/>
             </a:r>
             <a:r>
               <a:rPr kumimoji="0" lang="en-US" sz="1800" b="0" i="0" u="none" strike="noStrike" kern="1200" cap="none" spc="0" normalizeH="0" baseline="0" noProof="0" dirty="0">
@@ -6720,7 +6720,7 @@
                 <a:ea typeface="+mn-ea"/>
                 <a:cs typeface="+mn-cs"/>
               </a:rPr>
-              <a:t> </a:t>
+              <a:t/>
             </a:r>
             <a:r>
               <a:rPr kumimoji="0" lang="en-US" sz="1800" b="0" i="0" u="none" strike="noStrike" kern="1200" cap="none" spc="0" normalizeH="0" baseline="0" noProof="0" dirty="0" err="1">
@@ -6737,7 +6737,7 @@
                 <a:ea typeface="+mn-ea"/>
                 <a:cs typeface="+mn-cs"/>
               </a:rPr>
-              <a:t>жоопту</a:t>
+              <a:t/>
             </a:r>
             <a:r>
               <a:rPr kumimoji="0" lang="en-US" sz="1800" b="0" i="0" u="none" strike="noStrike" kern="1200" cap="none" spc="0" normalizeH="0" baseline="0" noProof="0" dirty="0">
@@ -6754,7 +6754,7 @@
                 <a:ea typeface="+mn-ea"/>
                 <a:cs typeface="+mn-cs"/>
               </a:rPr>
-              <a:t> </a:t>
+              <a:t/>
             </a:r>
             <a:r>
               <a:rPr kumimoji="0" lang="en-US" sz="1800" b="0" i="0" u="none" strike="noStrike" kern="1200" cap="none" spc="0" normalizeH="0" baseline="0" noProof="0" dirty="0" err="1">
@@ -6771,7 +6771,7 @@
                 <a:ea typeface="+mn-ea"/>
                 <a:cs typeface="+mn-cs"/>
               </a:rPr>
-              <a:t>тандап</a:t>
+              <a:t/>
             </a:r>
             <a:r>
               <a:rPr kumimoji="0" lang="en-US" sz="1800" b="0" i="0" u="none" strike="noStrike" kern="1200" cap="none" spc="0" normalizeH="0" baseline="0" noProof="0" dirty="0">
@@ -6788,7 +6788,7 @@
                 <a:ea typeface="+mn-ea"/>
                 <a:cs typeface="+mn-cs"/>
               </a:rPr>
-              <a:t>, </a:t>
+              <a:t/>
             </a:r>
             <a:r>
               <a:rPr kumimoji="0" lang="en-US" sz="1800" b="0" i="0" u="none" strike="noStrike" kern="1200" cap="none" spc="0" normalizeH="0" baseline="0" noProof="0" dirty="0" err="1">
@@ -6805,7 +6805,7 @@
                 <a:ea typeface="+mn-ea"/>
                 <a:cs typeface="+mn-cs"/>
               </a:rPr>
-              <a:t>аларды</a:t>
+              <a:t/>
             </a:r>
             <a:r>
               <a:rPr kumimoji="0" lang="en-US" sz="1800" b="0" i="0" u="none" strike="noStrike" kern="1200" cap="none" spc="0" normalizeH="0" baseline="0" noProof="0" dirty="0">
@@ -6822,7 +6822,7 @@
                 <a:ea typeface="+mn-ea"/>
                 <a:cs typeface="+mn-cs"/>
               </a:rPr>
-              <a:t> </a:t>
+              <a:t/>
             </a:r>
             <a:r>
               <a:rPr kumimoji="0" lang="ru-RU" sz="1800" b="0" i="0" u="none" strike="noStrike" kern="1200" cap="none" spc="0" normalizeH="0" baseline="0" noProof="0" dirty="0">
@@ -6839,7 +6839,7 @@
                 <a:ea typeface="+mn-ea"/>
                 <a:cs typeface="+mn-cs"/>
               </a:rPr>
-              <a:t>дептериндеги</a:t>
+              <a:t/>
             </a:r>
             <a:r>
               <a:rPr kumimoji="0" lang="en-US" sz="1800" b="0" i="0" u="none" strike="noStrike" kern="1200" cap="none" spc="0" normalizeH="0" baseline="0" noProof="0" dirty="0">
@@ -6856,7 +6856,7 @@
                 <a:ea typeface="+mn-ea"/>
                 <a:cs typeface="+mn-cs"/>
               </a:rPr>
-              <a:t> 3х3 </a:t>
+              <a:t/>
             </a:r>
             <a:r>
               <a:rPr kumimoji="0" lang="en-US" sz="1800" b="0" i="0" u="none" strike="noStrike" kern="1200" cap="none" spc="0" normalizeH="0" baseline="0" noProof="0" dirty="0" err="1">
@@ -6873,7 +6873,7 @@
                 <a:ea typeface="+mn-ea"/>
                 <a:cs typeface="+mn-cs"/>
               </a:rPr>
-              <a:t>квадратка</a:t>
+              <a:t/>
             </a:r>
             <a:r>
               <a:rPr kumimoji="0" lang="en-US" sz="1800" b="0" i="0" u="none" strike="noStrike" kern="1200" cap="none" spc="0" normalizeH="0" baseline="0" noProof="0" dirty="0">
@@ -6890,7 +6890,7 @@
                 <a:ea typeface="+mn-ea"/>
                 <a:cs typeface="+mn-cs"/>
               </a:rPr>
-              <a:t> </a:t>
+              <a:t/>
             </a:r>
             <a:r>
               <a:rPr kumimoji="0" lang="en-US" sz="1800" b="0" i="0" u="none" strike="noStrike" kern="1200" cap="none" spc="0" normalizeH="0" baseline="0" noProof="0" dirty="0" err="1">
@@ -6907,7 +6907,7 @@
                 <a:ea typeface="+mn-ea"/>
                 <a:cs typeface="+mn-cs"/>
               </a:rPr>
-              <a:t>туш</a:t>
+              <a:t/>
             </a:r>
             <a:r>
               <a:rPr kumimoji="0" lang="en-US" sz="1800" b="0" i="0" u="none" strike="noStrike" kern="1200" cap="none" spc="0" normalizeH="0" baseline="0" noProof="0" dirty="0">
@@ -6924,7 +6924,7 @@
                 <a:ea typeface="+mn-ea"/>
                 <a:cs typeface="+mn-cs"/>
               </a:rPr>
-              <a:t> </a:t>
+              <a:t/>
             </a:r>
             <a:r>
               <a:rPr kumimoji="0" lang="en-US" sz="1800" b="0" i="0" u="none" strike="noStrike" kern="1200" cap="none" spc="0" normalizeH="0" baseline="0" noProof="0" dirty="0" err="1">
@@ -6941,7 +6941,7 @@
                 <a:ea typeface="+mn-ea"/>
                 <a:cs typeface="+mn-cs"/>
               </a:rPr>
-              <a:t>келди</a:t>
+              <a:t/>
             </a:r>
             <a:r>
               <a:rPr kumimoji="0" lang="en-US" sz="1800" b="0" i="0" u="none" strike="noStrike" kern="1200" cap="none" spc="0" normalizeH="0" baseline="0" noProof="0" dirty="0">
@@ -6958,7 +6958,7 @@
                 <a:ea typeface="+mn-ea"/>
                 <a:cs typeface="+mn-cs"/>
               </a:rPr>
-              <a:t> </a:t>
+              <a:t/>
             </a:r>
             <a:r>
               <a:rPr kumimoji="0" lang="en-US" sz="1800" b="0" i="0" u="none" strike="noStrike" kern="1200" cap="none" spc="0" normalizeH="0" baseline="0" noProof="0" dirty="0" err="1">
@@ -6975,7 +6975,7 @@
                 <a:ea typeface="+mn-ea"/>
                 <a:cs typeface="+mn-cs"/>
               </a:rPr>
-              <a:t>жайгаштырышы</a:t>
+              <a:t/>
             </a:r>
             <a:r>
               <a:rPr kumimoji="0" lang="en-US" sz="1800" b="0" i="0" u="none" strike="noStrike" kern="1200" cap="none" spc="0" normalizeH="0" baseline="0" noProof="0" dirty="0">
@@ -6992,7 +6992,7 @@
                 <a:ea typeface="+mn-ea"/>
                 <a:cs typeface="+mn-cs"/>
               </a:rPr>
-              <a:t> </a:t>
+              <a:t/>
             </a:r>
             <a:r>
               <a:rPr kumimoji="0" lang="en-US" sz="1800" b="0" i="0" u="none" strike="noStrike" kern="1200" cap="none" spc="0" normalizeH="0" baseline="0" noProof="0" dirty="0" err="1">
@@ -7009,7 +7009,7 @@
                 <a:ea typeface="+mn-ea"/>
                 <a:cs typeface="+mn-cs"/>
               </a:rPr>
-              <a:t>керек</a:t>
+              <a:t/>
             </a:r>
             <a:r>
               <a:rPr kumimoji="0" lang="en-US" sz="1800" b="0" i="0" u="none" strike="noStrike" kern="1200" cap="none" spc="0" normalizeH="0" baseline="0" noProof="0" dirty="0">
@@ -7026,7 +7026,7 @@
                 <a:ea typeface="+mn-ea"/>
                 <a:cs typeface="+mn-cs"/>
               </a:rPr>
-              <a:t>.</a:t>
+              <a:t/>
             </a:r>
           </a:p>
           <a:p>
@@ -9303,7 +9303,7 @@
                   <a:schemeClr val="tx1"/>
                 </a:solidFill>
               </a:rPr>
-              <a:t>2.66</a:t>
+              <a:t>2,66</a:t>
             </a:r>
           </a:p>
         </p:txBody>
@@ -11427,7 +11427,7 @@
                   <a:schemeClr val="tx1"/>
                 </a:solidFill>
               </a:rPr>
-              <a:t>2.29</a:t>
+              <a:t>2,29</a:t>
             </a:r>
           </a:p>
         </p:txBody>
@@ -13283,7 +13283,7 @@
                   <a:schemeClr val="tx1"/>
                 </a:solidFill>
               </a:rPr>
-              <a:t>6.38</a:t>
+              <a:t>6,38</a:t>
             </a:r>
           </a:p>
         </p:txBody>
@@ -14895,7 +14895,7 @@
                   <a:schemeClr val="tx1"/>
                 </a:solidFill>
               </a:rPr>
-              <a:t>1.37</a:t>
+              <a:t>1,37</a:t>
             </a:r>
           </a:p>
         </p:txBody>
@@ -16751,7 +16751,7 @@
                   <a:schemeClr val="tx1"/>
                 </a:solidFill>
               </a:rPr>
-              <a:t>2.72</a:t>
+              <a:t>2,72</a:t>
             </a:r>
           </a:p>
         </p:txBody>
@@ -18875,7 +18875,7 @@
                   <a:schemeClr val="tx1"/>
                 </a:solidFill>
               </a:rPr>
-              <a:t>3.05</a:t>
+              <a:t>3,05</a:t>
             </a:r>
           </a:p>
         </p:txBody>
@@ -20351,7 +20351,7 @@
                   <a:schemeClr val="tx1"/>
                 </a:solidFill>
               </a:rPr>
-              <a:t>1.67</a:t>
+              <a:t>1,67</a:t>
             </a:r>
           </a:p>
         </p:txBody>
@@ -22475,7 +22475,7 @@
                   <a:schemeClr val="tx1"/>
                 </a:solidFill>
               </a:rPr>
-              <a:t>3.18</a:t>
+              <a:t>3,18</a:t>
             </a:r>
           </a:p>
         </p:txBody>
@@ -24331,7 +24331,7 @@
                   <a:schemeClr val="tx1"/>
                 </a:solidFill>
               </a:rPr>
-              <a:t>8.45</a:t>
+              <a:t>8,45</a:t>
             </a:r>
           </a:p>
         </p:txBody>
@@ -25807,7 +25807,7 @@
                   <a:schemeClr val="tx1"/>
                 </a:solidFill>
               </a:rPr>
-              <a:t>2.83</a:t>
+              <a:t>2,83</a:t>
             </a:r>
           </a:p>
         </p:txBody>
@@ -36448,7 +36448,7 @@
                           <a:ea typeface="+mn-ea"/>
                           <a:cs typeface="+mn-cs"/>
                         </a:rPr>
-                        <a:t>2.29</a:t>
+                        <a:t>2,29</a:t>
                       </a:r>
                     </a:p>
                   </a:txBody>
@@ -36531,7 +36531,7 @@
                           <a:ea typeface="+mn-ea"/>
                           <a:cs typeface="+mn-cs"/>
                         </a:rPr>
-                        <a:t>1.37</a:t>
+                        <a:t>1,37</a:t>
                       </a:r>
                     </a:p>
                   </a:txBody>
@@ -36614,7 +36614,7 @@
                           <a:ea typeface="+mn-ea"/>
                           <a:cs typeface="+mn-cs"/>
                         </a:rPr>
-                        <a:t>2.72</a:t>
+                        <a:t>2,72</a:t>
                       </a:r>
                     </a:p>
                   </a:txBody>
@@ -36697,7 +36697,7 @@
                           <a:ea typeface="+mn-ea"/>
                           <a:cs typeface="+mn-cs"/>
                         </a:rPr>
-                        <a:t>3.05</a:t>
+                        <a:t>3,05</a:t>
                       </a:r>
                     </a:p>
                   </a:txBody>
@@ -36787,7 +36787,7 @@
                           <a:ea typeface="+mn-ea"/>
                           <a:cs typeface="+mn-cs"/>
                         </a:rPr>
-                        <a:t>2.83</a:t>
+                        <a:t>2,83</a:t>
                       </a:r>
                     </a:p>
                   </a:txBody>
@@ -36870,7 +36870,7 @@
                           <a:ea typeface="+mn-ea"/>
                           <a:cs typeface="+mn-cs"/>
                         </a:rPr>
-                        <a:t>3.18</a:t>
+                        <a:t>3,18</a:t>
                       </a:r>
                     </a:p>
                   </a:txBody>
@@ -36953,7 +36953,7 @@
                           <a:ea typeface="+mn-ea"/>
                           <a:cs typeface="+mn-cs"/>
                         </a:rPr>
-                        <a:t>7.4</a:t>
+                        <a:t>7,4</a:t>
                       </a:r>
                     </a:p>
                   </a:txBody>
@@ -37036,7 +37036,7 @@
                           <a:ea typeface="+mn-ea"/>
                           <a:cs typeface="+mn-cs"/>
                         </a:rPr>
-                        <a:t>2.57</a:t>
+                        <a:t>2,57</a:t>
                       </a:r>
                     </a:p>
                   </a:txBody>
@@ -37126,7 +37126,7 @@
                           <a:ea typeface="+mn-ea"/>
                           <a:cs typeface="+mn-cs"/>
                         </a:rPr>
-                        <a:t>0.39</a:t>
+                        <a:t>0,39</a:t>
                       </a:r>
                     </a:p>
                   </a:txBody>
@@ -37209,7 +37209,7 @@
                           <a:ea typeface="+mn-ea"/>
                           <a:cs typeface="+mn-cs"/>
                         </a:rPr>
-                        <a:t>6.38</a:t>
+                        <a:t>6,38</a:t>
                       </a:r>
                     </a:p>
                   </a:txBody>
@@ -37292,7 +37292,7 @@
                           <a:ea typeface="+mn-ea"/>
                           <a:cs typeface="+mn-cs"/>
                         </a:rPr>
-                        <a:t>1.67</a:t>
+                        <a:t>1,67</a:t>
                       </a:r>
                     </a:p>
                   </a:txBody>
@@ -37375,7 +37375,7 @@
                           <a:ea typeface="+mn-ea"/>
                           <a:cs typeface="+mn-cs"/>
                         </a:rPr>
-                        <a:t>0.53</a:t>
+                        <a:t>0,53</a:t>
                       </a:r>
                     </a:p>
                   </a:txBody>
@@ -37465,7 +37465,7 @@
                           <a:ea typeface="+mn-ea"/>
                           <a:cs typeface="+mn-cs"/>
                         </a:rPr>
-                        <a:t>7.42</a:t>
+                        <a:t>7,42</a:t>
                       </a:r>
                     </a:p>
                   </a:txBody>
@@ -37548,7 +37548,7 @@
                           <a:ea typeface="+mn-ea"/>
                           <a:cs typeface="+mn-cs"/>
                         </a:rPr>
-                        <a:t>2.66</a:t>
+                        <a:t>2,66</a:t>
                       </a:r>
                     </a:p>
                   </a:txBody>
@@ -37631,7 +37631,7 @@
                           <a:ea typeface="+mn-ea"/>
                           <a:cs typeface="+mn-cs"/>
                         </a:rPr>
-                        <a:t>8.45</a:t>
+                        <a:t>8,45</a:t>
                       </a:r>
                     </a:p>
                   </a:txBody>
@@ -37714,7 +37714,7 @@
                           <a:ea typeface="+mn-ea"/>
                           <a:cs typeface="+mn-cs"/>
                         </a:rPr>
-                        <a:t>7.27</a:t>
+                        <a:t>7,27</a:t>
                       </a:r>
                     </a:p>
                   </a:txBody>
@@ -39284,7 +39284,7 @@
                   <a:schemeClr val="tx1"/>
                 </a:solidFill>
               </a:rPr>
-              <a:t>7.4</a:t>
+              <a:t>7,4</a:t>
             </a:r>
           </a:p>
         </p:txBody>
@@ -42474,7 +42474,7 @@
                   <a:schemeClr val="tx1"/>
                 </a:solidFill>
               </a:rPr>
-              <a:t>7.42</a:t>
+              <a:t>7,42</a:t>
             </a:r>
           </a:p>
         </p:txBody>
@@ -43986,7 +43986,7 @@
                   <a:schemeClr val="tx1"/>
                 </a:solidFill>
               </a:rPr>
-              <a:t>2.57</a:t>
+              <a:t>2,57</a:t>
             </a:r>
           </a:p>
         </p:txBody>
@@ -46267,7 +46267,7 @@
                   <a:schemeClr val="tx1"/>
                 </a:solidFill>
               </a:rPr>
-              <a:t>0.39</a:t>
+              <a:t>0,39</a:t>
             </a:r>
           </a:p>
         </p:txBody>
@@ -48123,7 +48123,7 @@
                   <a:schemeClr val="tx1"/>
                 </a:solidFill>
               </a:rPr>
-              <a:t>7.27</a:t>
+              <a:t>7,27</a:t>
             </a:r>
           </a:p>
         </p:txBody>
@@ -49599,7 +49599,7 @@
                   <a:schemeClr val="tx1"/>
                 </a:solidFill>
               </a:rPr>
-              <a:t>0.53</a:t>
+              <a:t>0,53</a:t>
             </a:r>
           </a:p>
         </p:txBody>
